--- a/dist/초2/국어/이야기와쓰기/초2_국어_이야기와쓰기_02_인물의마음_학생용.pptx
+++ b/dist/초2/국어/이야기와쓰기/초2_국어_이야기와쓰기_02_인물의마음_학생용.pptx
@@ -118,13 +118,13 @@
   <p:extLst>
     <p:ext uri="{521415D9-36F7-43E2-AB2F-B90AF26B5E84}">
       <p14:sectionLst xmlns:p14="http://schemas.microsoft.com/office/powerpoint/2010/main">
-        <p14:section name="도입" id="{859c39ad-dd1e-b6c9-4760-e8e4c64e7ffe}">
+        <p14:section name="도입" id="{d0a23e02-29ff-4bcd-371e-528174edc5c6}">
           <p14:sldIdLst>
             <p14:sldId id="256"/>
             <p14:sldId id="257"/>
           </p14:sldIdLst>
         </p14:section>
-        <p14:section name="개념" id="{c3567d7c-5bad-b0ec-f502-f65a17a196bc}">
+        <p14:section name="개념" id="{ac663d6f-a6e6-8d7d-ff4f-9c8539812d0d}">
           <p14:sldIdLst>
             <p14:sldId id="258"/>
             <p14:sldId id="259"/>
@@ -132,24 +132,24 @@
             <p14:sldId id="261"/>
           </p14:sldIdLst>
         </p14:section>
-        <p14:section name="연습" id="{2de5d5e4-d034-00b9-4674-4e4a46a3b24b}">
+        <p14:section name="연습" id="{49b9597d-a4ab-db6f-2697-44b6650d4b1f}">
           <p14:sldIdLst>
             <p14:sldId id="262"/>
             <p14:sldId id="263"/>
           </p14:sldIdLst>
         </p14:section>
-        <p14:section name="확인" id="{49cb8391-137f-b534-cb68-998bef0d5ea2}">
+        <p14:section name="확인" id="{11672ee4-37af-cb7a-ab81-445e15b02d5a}">
           <p14:sldIdLst>
             <p14:sldId id="264"/>
             <p14:sldId id="265"/>
           </p14:sldIdLst>
         </p14:section>
-        <p14:section name="정리" id="{2d2d8443-68fa-f7f3-a7ed-07dcbc3bacd1}">
+        <p14:section name="정리" id="{ea9caca1-f13a-4503-a362-15f5affc37e2}">
           <p14:sldIdLst>
             <p14:sldId id="266"/>
           </p14:sldIdLst>
         </p14:section>
-        <p14:section name="보충" id="{80296528-670d-3fb4-f418-ad571744fc4a}">
+        <p14:section name="보충" id="{25164e07-ad9f-c66c-f993-c2997a62a7c4}">
           <p14:sldIdLst>
             <p14:sldId id="267"/>
           </p14:sldIdLst>
